--- a/lecons/LSA/Climatology/LSA_CLIM_L18_Air_Masses.pptx
+++ b/lecons/LSA/Climatology/LSA_CLIM_L18_Air_Masses.pptx
@@ -2934,7 +2934,7 @@
           <a:p>
             <a:r>
               <a:rPr lang="en-US" dirty="0"/>
-              <a:t>Let us copy DEFINITIONS. The key terms of this lesson are defined as follows. Write each point on a new line, with the key term first. When you finish, we go to the next slide.</a:t>
+              <a:t>Let us copy the definitions. The key terms of this lesson are defined as follows. On this slide we have Air mass. Write each point on a new line, with the key term first, and explain it in your own words when we revise. When you finish, we go to the next slide.</a:t>
             </a:r>
             <a:endParaRPr lang="en-US" dirty="0"/>
           </a:p>
@@ -3022,7 +3022,7 @@
           <a:p>
             <a:r>
               <a:rPr lang="en-US" dirty="0"/>
-              <a:t>We continue with the same part. Write each point on a new line, with the key term first.</a:t>
+              <a:t>We continue with the definitions. On this slide we have Front and ITCZ (ITF). Write each point on a new line, with the key term first, and explain it in your own words when we revise.</a:t>
             </a:r>
             <a:endParaRPr lang="en-US" dirty="0"/>
           </a:p>
@@ -3110,7 +3110,7 @@
           <a:p>
             <a:r>
               <a:rPr lang="en-US" dirty="0"/>
-              <a:t>Let us copy Characteristics and Development. Air masses acquire their characteristics as follows. Write each point on a new line, with the key term first. When you finish, we go to the next slide.</a:t>
+              <a:t>Let us copy Characteristics and Development. Air masses acquire their characteristics as follows. On this slide we have Source regions. Write each point on a new line, with the key term first, and explain it in your own words when we revise. When you finish, we go to the next slide.</a:t>
             </a:r>
             <a:endParaRPr lang="en-US" dirty="0"/>
           </a:p>
@@ -3198,7 +3198,7 @@
           <a:p>
             <a:r>
               <a:rPr lang="en-US" dirty="0"/>
-              <a:t>We continue with the same part. Write each point on a new line, with the key term first.</a:t>
+              <a:t>We continue with Characteristics and Development. On this slide we have Development and Modification. Write each point on a new line, with the key term first, and explain it in your own words when we revise.</a:t>
             </a:r>
             <a:endParaRPr lang="en-US" dirty="0"/>
           </a:p>
@@ -3374,7 +3374,7 @@
           <a:p>
             <a:r>
               <a:rPr lang="en-US" dirty="0"/>
-              <a:t>Let us copy Classification and Examples. Air masses are classified by their source region. Write each point on a new line, with the key term first. When you finish, we go to the next slide.</a:t>
+              <a:t>Let us copy Classification and Examples. Air masses are classified by their source region. On this slide we have By temperature. Write each point on a new line, with the key term first, and explain it in your own words when we revise. When you finish, we go to the next slide.</a:t>
             </a:r>
             <a:endParaRPr lang="en-US" dirty="0"/>
           </a:p>
@@ -3550,7 +3550,7 @@
           <a:p>
             <a:r>
               <a:rPr lang="en-US" dirty="0"/>
-              <a:t>We continue with the same part. Write each point on a new line, with the key term first.</a:t>
+              <a:t>We continue with Classification and Examples. On this slide we have By humidity. Write each point on a new line, with the key term first, and explain it in your own words when we revise.</a:t>
             </a:r>
             <a:endParaRPr lang="en-US" dirty="0"/>
           </a:p>
@@ -3726,7 +3726,7 @@
           <a:p>
             <a:r>
               <a:rPr lang="en-US" dirty="0"/>
-              <a:t>Let us copy Air Masses of Cameroon and West Africa. Two air masses control the climate of Cameroon. Write each point on a new line, with the key term first. When you finish, we go to the next slide.</a:t>
+              <a:t>Let us copy Air Masses of Cameroon and West Africa. Two air masses control the climate of Cameroon. On this slide we have Maritime tropical (mT) air. Write each point on a new line, with the key term first, and explain it in your own words when we revise. When you finish, we go to the next slide.</a:t>
             </a:r>
             <a:endParaRPr lang="en-US" dirty="0"/>
           </a:p>
@@ -3814,7 +3814,7 @@
           <a:p>
             <a:r>
               <a:rPr lang="en-US" dirty="0"/>
-              <a:t>We continue with the same part. Write each point on a new line, with the key term first. When you finish, we go to the next slide.</a:t>
+              <a:t>We continue with Air Masses of Cameroon and West Africa. On this slide we have Continental tropical (cT) air. Write each point on a new line, with the key term first, and explain it in your own words when we revise. When you finish, we go to the next slide.</a:t>
             </a:r>
             <a:endParaRPr lang="en-US" dirty="0"/>
           </a:p>
@@ -3902,7 +3902,7 @@
           <a:p>
             <a:r>
               <a:rPr lang="en-US" dirty="0"/>
-              <a:t>We continue with the same part. Write each point on a new line, with the key term first.</a:t>
+              <a:t>We continue with Air Masses of Cameroon and West Africa. On this slide we have Movement. Write each point on a new line, with the key term first, and explain it in your own words when we revise.</a:t>
             </a:r>
             <a:endParaRPr lang="en-US" dirty="0"/>
           </a:p>
@@ -5222,7 +5222,7 @@
           <a:p>
             <a:r>
               <a:rPr lang="en-US" dirty="0"/>
-              <a:t>Here is the plan of our lesson today. We shall correction of the homework; then objectives and recall; then real-life situation and action to take; then learning activities; then board summary; then evaluation, remediation and homework.</a:t>
+              <a:t>Here is the plan of our lesson today. First, we shall correct the homework. Then we shall look at the objectives and recall what you already know. After that, we shall study a situation from real life and the action to take, and do the learning activities. Finally, we shall copy the board summary, do the evaluation and the remediation, and I will give you the homework.</a:t>
             </a:r>
             <a:endParaRPr lang="en-US" dirty="0"/>
           </a:p>
@@ -6762,7 +6762,7 @@
                 <a:ea typeface="Times New Roman" pitchFamily="34" charset="-122"/>
                 <a:cs typeface="Times New Roman" pitchFamily="34" charset="-120"/>
               </a:rPr>
-              <a:t>Lesson 18: Air Masses</a:t>
+              <a:t>Lesson 18</a:t>
             </a:r>
             <a:endParaRPr lang="en-US" sz="2600" dirty="0"/>
           </a:p>
